--- a/slides/DHS-2026-Agentic-AI.pptx
+++ b/slides/DHS-2026-Agentic-AI.pptx
@@ -31,20 +31,23 @@
   <p:notesSz cx="6858000" cy="9144000"/>
   <p:embeddedFontLst>
     <p:embeddedFont>
-      <p:font typeface="Inter" panose="02000503000000020004" pitchFamily="2" charset="0"/>
+      <p:font typeface="Inter" panose="020B0604020202020204" charset="0"/>
       <p:regular r:id="rId21"/>
       <p:bold r:id="rId22"/>
       <p:italic r:id="rId23"/>
       <p:boldItalic r:id="rId24"/>
     </p:embeddedFont>
     <p:embeddedFont>
-      <p:font typeface="Poppins" pitchFamily="2" charset="77"/>
+      <p:font typeface="Poppins" panose="00000500000000000000" pitchFamily="2" charset="0"/>
       <p:regular r:id="rId25"/>
       <p:bold r:id="rId26"/>
+      <p:italic r:id="rId27"/>
+      <p:boldItalic r:id="rId28"/>
     </p:embeddedFont>
     <p:embeddedFont>
-      <p:font typeface="Poppins Medium" panose="00000600000000000000" pitchFamily="2" charset="77"/>
-      <p:regular r:id="rId27"/>
+      <p:font typeface="Poppins Medium" panose="00000600000000000000" pitchFamily="2" charset="0"/>
+      <p:regular r:id="rId29"/>
+      <p:italic r:id="rId30"/>
     </p:embeddedFont>
   </p:embeddedFontLst>
   <p:defaultTextStyle>
@@ -293,6 +296,14 @@
     </p:ext>
   </p:extLst>
 </p:presentation>
+</file>
+
+<file path=ppt/revisionInfo.xml><?xml version="1.0" encoding="utf-8"?>
+<p1510:revInfo xmlns:a="http://schemas.openxmlformats.org/drawingml/2006/main" xmlns:r="http://schemas.openxmlformats.org/officeDocument/2006/relationships" xmlns:p1510="http://schemas.microsoft.com/office/powerpoint/2015/10/main">
+  <p1510:revLst>
+    <p1510:client id="{24B5E6DA-D863-0C71-78FF-DA6FBB8B881D}" v="7" dt="2026-07-18T08:39:39.194"/>
+  </p1510:revLst>
+</p1510:revInfo>
 </file>
 
 <file path=ppt/notesMasters/notesMaster1.xml><?xml version="1.0" encoding="utf-8"?>
@@ -765,7 +776,7 @@
         </p:nvSpPr>
         <p:spPr>
           <a:xfrm>
-            <a:off x="381300" y="685800"/>
+            <a:off x="381000" y="685800"/>
             <a:ext cx="6096000" cy="3429000"/>
           </a:xfrm>
           <a:custGeom>
@@ -5786,34 +5797,6 @@
           </a:p>
         </p:txBody>
       </p:sp>
-      <p:pic>
-        <p:nvPicPr>
-          <p:cNvPr id="56" name="Google Shape;56;p13" title="Speaker_hacksession.jpg"/>
-          <p:cNvPicPr preferRelativeResize="0"/>
-          <p:nvPr/>
-        </p:nvPicPr>
-        <p:blipFill>
-          <a:blip r:embed="rId3">
-            <a:alphaModFix/>
-          </a:blip>
-          <a:stretch>
-            <a:fillRect/>
-          </a:stretch>
-        </p:blipFill>
-        <p:spPr>
-          <a:xfrm>
-            <a:off x="0" y="0"/>
-            <a:ext cx="9144000" cy="5143500"/>
-          </a:xfrm>
-          <a:prstGeom prst="rect">
-            <a:avLst/>
-          </a:prstGeom>
-          <a:noFill/>
-          <a:ln>
-            <a:noFill/>
-          </a:ln>
-        </p:spPr>
-      </p:pic>
       <p:sp>
         <p:nvSpPr>
           <p:cNvPr id="57" name="Google Shape;57;p13"/>
@@ -6020,7 +6003,7 @@
           <p:nvPr/>
         </p:nvPicPr>
         <p:blipFill>
-          <a:blip r:embed="rId4">
+          <a:blip r:embed="rId3">
             <a:alphaModFix/>
           </a:blip>
           <a:stretch>

--- a/slides/DHS-2026-Agentic-AI.pptx
+++ b/slides/DHS-2026-Agentic-AI.pptx
@@ -8,46 +8,46 @@
     <p:notesMasterId r:id="rId20"/>
   </p:notesMasterIdLst>
   <p:sldIdLst>
-    <p:sldId id="276" r:id="rId36"/>
-    <p:sldId id="277" r:id="rId37"/>
-    <p:sldId id="278" r:id="rId38"/>
-    <p:sldId id="279" r:id="rId39"/>
-    <p:sldId id="280" r:id="rId40"/>
-    <p:sldId id="281" r:id="rId41"/>
-    <p:sldId id="282" r:id="rId42"/>
-    <p:sldId id="283" r:id="rId43"/>
-    <p:sldId id="284" r:id="rId44"/>
-    <p:sldId id="285" r:id="rId45"/>
-    <p:sldId id="286" r:id="rId46"/>
-    <p:sldId id="287" r:id="rId47"/>
-    <p:sldId id="288" r:id="rId48"/>
-    <p:sldId id="289" r:id="rId49"/>
-    <p:sldId id="290" r:id="rId50"/>
-    <p:sldId id="291" r:id="rId51"/>
-    <p:sldId id="292" r:id="rId52"/>
-    <p:sldId id="293" r:id="rId53"/>
-    <p:sldId id="294" r:id="rId54"/>
-    <p:sldId id="295" r:id="rId55"/>
-    <p:sldId id="296" r:id="rId56"/>
-    <p:sldId id="297" r:id="rId57"/>
-    <p:sldId id="298" r:id="rId58"/>
-    <p:sldId id="299" r:id="rId59"/>
-    <p:sldId id="300" r:id="rId60"/>
-    <p:sldId id="301" r:id="rId61"/>
-    <p:sldId id="302" r:id="rId62"/>
-    <p:sldId id="303" r:id="rId63"/>
-    <p:sldId id="304" r:id="rId64"/>
-    <p:sldId id="305" r:id="rId65"/>
-    <p:sldId id="306" r:id="rId66"/>
-    <p:sldId id="307" r:id="rId67"/>
-    <p:sldId id="308" r:id="rId68"/>
-    <p:sldId id="309" r:id="rId69"/>
-    <p:sldId id="310" r:id="rId70"/>
-    <p:sldId id="311" r:id="rId71"/>
-    <p:sldId id="312" r:id="rId72"/>
-    <p:sldId id="313" r:id="rId73"/>
-    <p:sldId id="314" r:id="rId74"/>
-    <p:sldId id="315" r:id="rId75"/>
+    <p:sldId id="316" r:id="rId19"/>
+    <p:sldId id="317" r:id="rId18"/>
+    <p:sldId id="318" r:id="rId17"/>
+    <p:sldId id="319" r:id="rId16"/>
+    <p:sldId id="320" r:id="rId15"/>
+    <p:sldId id="321" r:id="rId14"/>
+    <p:sldId id="322" r:id="rId13"/>
+    <p:sldId id="323" r:id="rId12"/>
+    <p:sldId id="324" r:id="rId11"/>
+    <p:sldId id="325" r:id="rId10"/>
+    <p:sldId id="326" r:id="rId9"/>
+    <p:sldId id="327" r:id="rId8"/>
+    <p:sldId id="328" r:id="rId7"/>
+    <p:sldId id="329" r:id="rId6"/>
+    <p:sldId id="330" r:id="rId5"/>
+    <p:sldId id="331" r:id="rId4"/>
+    <p:sldId id="332" r:id="rId3"/>
+    <p:sldId id="333" r:id="rId2"/>
+    <p:sldId id="334" r:id="rId76"/>
+    <p:sldId id="335" r:id="rId77"/>
+    <p:sldId id="336" r:id="rId78"/>
+    <p:sldId id="337" r:id="rId79"/>
+    <p:sldId id="338" r:id="rId80"/>
+    <p:sldId id="339" r:id="rId81"/>
+    <p:sldId id="340" r:id="rId82"/>
+    <p:sldId id="341" r:id="rId83"/>
+    <p:sldId id="342" r:id="rId84"/>
+    <p:sldId id="343" r:id="rId85"/>
+    <p:sldId id="344" r:id="rId86"/>
+    <p:sldId id="345" r:id="rId87"/>
+    <p:sldId id="346" r:id="rId88"/>
+    <p:sldId id="347" r:id="rId89"/>
+    <p:sldId id="348" r:id="rId90"/>
+    <p:sldId id="349" r:id="rId91"/>
+    <p:sldId id="350" r:id="rId92"/>
+    <p:sldId id="351" r:id="rId93"/>
+    <p:sldId id="352" r:id="rId94"/>
+    <p:sldId id="353" r:id="rId95"/>
+    <p:sldId id="354" r:id="rId96"/>
+    <p:sldId id="355" r:id="rId97"/>
   </p:sldIdLst>
   <p:sldSz cx="9144000" cy="5143500" type="screen16x9"/>
   <p:notesSz cx="6858000" cy="9144000"/>
@@ -5518,7 +5518,7 @@
 </p:sldMaster>
 </file>
 
-<file path=ppt/slides/slide19.xml><?xml version="1.0" encoding="utf-8"?>
+<file path=ppt/slides/slide41.xml><?xml version="1.0" encoding="utf-8"?>
 <p:sld xmlns:a="http://schemas.openxmlformats.org/drawingml/2006/main" xmlns:p="http://schemas.openxmlformats.org/presentationml/2006/main" xmlns:r="http://schemas.openxmlformats.org/officeDocument/2006/relationships">
   <p:cSld>
     <p:spTree>
@@ -5759,7 +5759,7 @@
 </p:sld>
 </file>
 
-<file path=ppt/slides/slide20.xml><?xml version="1.0" encoding="utf-8"?>
+<file path=ppt/slides/slide42.xml><?xml version="1.0" encoding="utf-8"?>
 <p:sld xmlns:a="http://schemas.openxmlformats.org/drawingml/2006/main" xmlns:p="http://schemas.openxmlformats.org/presentationml/2006/main" xmlns:r="http://schemas.openxmlformats.org/officeDocument/2006/relationships">
   <p:cSld>
     <p:spTree>
@@ -6805,7 +6805,7 @@
 </p:sld>
 </file>
 
-<file path=ppt/slides/slide21.xml><?xml version="1.0" encoding="utf-8"?>
+<file path=ppt/slides/slide43.xml><?xml version="1.0" encoding="utf-8"?>
 <p:sld xmlns:a="http://schemas.openxmlformats.org/drawingml/2006/main" xmlns:p="http://schemas.openxmlformats.org/presentationml/2006/main" xmlns:r="http://schemas.openxmlformats.org/officeDocument/2006/relationships">
   <p:cSld>
     <p:spTree>
@@ -7563,7 +7563,7 @@
 </p:sld>
 </file>
 
-<file path=ppt/slides/slide22.xml><?xml version="1.0" encoding="utf-8"?>
+<file path=ppt/slides/slide44.xml><?xml version="1.0" encoding="utf-8"?>
 <p:sld xmlns:a="http://schemas.openxmlformats.org/drawingml/2006/main" xmlns:p="http://schemas.openxmlformats.org/presentationml/2006/main" xmlns:r="http://schemas.openxmlformats.org/officeDocument/2006/relationships">
   <p:cSld>
     <p:spTree>
@@ -8212,7 +8212,7 @@
 </p:sld>
 </file>
 
-<file path=ppt/slides/slide23.xml><?xml version="1.0" encoding="utf-8"?>
+<file path=ppt/slides/slide45.xml><?xml version="1.0" encoding="utf-8"?>
 <p:sld xmlns:a="http://schemas.openxmlformats.org/drawingml/2006/main" xmlns:p="http://schemas.openxmlformats.org/presentationml/2006/main" xmlns:r="http://schemas.openxmlformats.org/officeDocument/2006/relationships">
   <p:cSld>
     <p:spTree>
@@ -9370,7 +9370,7 @@
 </p:sld>
 </file>
 
-<file path=ppt/slides/slide24.xml><?xml version="1.0" encoding="utf-8"?>
+<file path=ppt/slides/slide46.xml><?xml version="1.0" encoding="utf-8"?>
 <p:sld xmlns:a="http://schemas.openxmlformats.org/drawingml/2006/main" xmlns:p="http://schemas.openxmlformats.org/presentationml/2006/main" xmlns:r="http://schemas.openxmlformats.org/officeDocument/2006/relationships">
   <p:cSld>
     <p:spTree>
@@ -10471,7 +10471,7 @@
 </p:sld>
 </file>
 
-<file path=ppt/slides/slide25.xml><?xml version="1.0" encoding="utf-8"?>
+<file path=ppt/slides/slide47.xml><?xml version="1.0" encoding="utf-8"?>
 <p:sld xmlns:a="http://schemas.openxmlformats.org/drawingml/2006/main" xmlns:p="http://schemas.openxmlformats.org/presentationml/2006/main" xmlns:r="http://schemas.openxmlformats.org/officeDocument/2006/relationships">
   <p:cSld>
     <p:spTree>
@@ -11348,7 +11348,7 @@
 </p:sld>
 </file>
 
-<file path=ppt/slides/slide26.xml><?xml version="1.0" encoding="utf-8"?>
+<file path=ppt/slides/slide48.xml><?xml version="1.0" encoding="utf-8"?>
 <p:sld xmlns:a="http://schemas.openxmlformats.org/drawingml/2006/main" xmlns:p="http://schemas.openxmlformats.org/presentationml/2006/main" xmlns:r="http://schemas.openxmlformats.org/officeDocument/2006/relationships">
   <p:cSld>
     <p:spTree>
@@ -12436,7 +12436,7 @@
 </p:sld>
 </file>
 
-<file path=ppt/slides/slide27.xml><?xml version="1.0" encoding="utf-8"?>
+<file path=ppt/slides/slide49.xml><?xml version="1.0" encoding="utf-8"?>
 <p:sld xmlns:a="http://schemas.openxmlformats.org/drawingml/2006/main" xmlns:p="http://schemas.openxmlformats.org/presentationml/2006/main" xmlns:r="http://schemas.openxmlformats.org/officeDocument/2006/relationships">
   <p:cSld>
     <p:spTree>
@@ -13126,7 +13126,7 @@
 </p:sld>
 </file>
 
-<file path=ppt/slides/slide28.xml><?xml version="1.0" encoding="utf-8"?>
+<file path=ppt/slides/slide50.xml><?xml version="1.0" encoding="utf-8"?>
 <p:sld xmlns:a="http://schemas.openxmlformats.org/drawingml/2006/main" xmlns:p="http://schemas.openxmlformats.org/presentationml/2006/main" xmlns:r="http://schemas.openxmlformats.org/officeDocument/2006/relationships">
   <p:cSld>
     <p:spTree>
@@ -13851,7 +13851,7 @@
 </p:sld>
 </file>
 
-<file path=ppt/slides/slide29.xml><?xml version="1.0" encoding="utf-8"?>
+<file path=ppt/slides/slide51.xml><?xml version="1.0" encoding="utf-8"?>
 <p:sld xmlns:a="http://schemas.openxmlformats.org/drawingml/2006/main" xmlns:p="http://schemas.openxmlformats.org/presentationml/2006/main" xmlns:r="http://schemas.openxmlformats.org/officeDocument/2006/relationships">
   <p:cSld>
     <p:spTree>
@@ -14771,7 +14771,7 @@
 </p:sld>
 </file>
 
-<file path=ppt/slides/slide30.xml><?xml version="1.0" encoding="utf-8"?>
+<file path=ppt/slides/slide52.xml><?xml version="1.0" encoding="utf-8"?>
 <p:sld xmlns:a="http://schemas.openxmlformats.org/drawingml/2006/main" xmlns:p="http://schemas.openxmlformats.org/presentationml/2006/main" xmlns:r="http://schemas.openxmlformats.org/officeDocument/2006/relationships">
   <p:cSld>
     <p:spTree>
@@ -15615,7 +15615,7 @@
 </p:sld>
 </file>
 
-<file path=ppt/slides/slide31.xml><?xml version="1.0" encoding="utf-8"?>
+<file path=ppt/slides/slide53.xml><?xml version="1.0" encoding="utf-8"?>
 <p:sld xmlns:a="http://schemas.openxmlformats.org/drawingml/2006/main" xmlns:p="http://schemas.openxmlformats.org/presentationml/2006/main" xmlns:r="http://schemas.openxmlformats.org/officeDocument/2006/relationships">
   <p:cSld>
     <p:spTree>
@@ -16385,7 +16385,7 @@
 </p:sld>
 </file>
 
-<file path=ppt/slides/slide32.xml><?xml version="1.0" encoding="utf-8"?>
+<file path=ppt/slides/slide54.xml><?xml version="1.0" encoding="utf-8"?>
 <p:sld xmlns:a="http://schemas.openxmlformats.org/drawingml/2006/main" xmlns:p="http://schemas.openxmlformats.org/presentationml/2006/main" xmlns:r="http://schemas.openxmlformats.org/officeDocument/2006/relationships">
   <p:cSld>
     <p:spTree>
@@ -17239,7 +17239,7 @@
 </p:sld>
 </file>
 
-<file path=ppt/slides/slide33.xml><?xml version="1.0" encoding="utf-8"?>
+<file path=ppt/slides/slide55.xml><?xml version="1.0" encoding="utf-8"?>
 <p:sld xmlns:a="http://schemas.openxmlformats.org/drawingml/2006/main" xmlns:p="http://schemas.openxmlformats.org/presentationml/2006/main" xmlns:r="http://schemas.openxmlformats.org/officeDocument/2006/relationships">
   <p:cSld>
     <p:spTree>
@@ -18160,7 +18160,7 @@
 </p:sld>
 </file>
 
-<file path=ppt/slides/slide34.xml><?xml version="1.0" encoding="utf-8"?>
+<file path=ppt/slides/slide56.xml><?xml version="1.0" encoding="utf-8"?>
 <p:sld xmlns:a="http://schemas.openxmlformats.org/drawingml/2006/main" xmlns:p="http://schemas.openxmlformats.org/presentationml/2006/main" xmlns:r="http://schemas.openxmlformats.org/officeDocument/2006/relationships">
   <p:cSld>
     <p:spTree>
@@ -19011,7 +19011,7 @@
 </p:sld>
 </file>
 
-<file path=ppt/slides/slide35.xml><?xml version="1.0" encoding="utf-8"?>
+<file path=ppt/slides/slide57.xml><?xml version="1.0" encoding="utf-8"?>
 <p:sld xmlns:a="http://schemas.openxmlformats.org/drawingml/2006/main" xmlns:p="http://schemas.openxmlformats.org/presentationml/2006/main" xmlns:r="http://schemas.openxmlformats.org/officeDocument/2006/relationships">
   <p:cSld>
     <p:spTree>
@@ -20155,7 +20155,7 @@
 </p:sld>
 </file>
 
-<file path=ppt/slides/slide36.xml><?xml version="1.0" encoding="utf-8"?>
+<file path=ppt/slides/slide58.xml><?xml version="1.0" encoding="utf-8"?>
 <p:sld xmlns:a="http://schemas.openxmlformats.org/drawingml/2006/main" xmlns:p="http://schemas.openxmlformats.org/presentationml/2006/main" xmlns:r="http://schemas.openxmlformats.org/officeDocument/2006/relationships">
   <p:cSld>
     <p:spTree>
@@ -20888,7 +20888,7 @@
 </p:sld>
 </file>
 
-<file path=ppt/slides/slide37.xml><?xml version="1.0" encoding="utf-8"?>
+<file path=ppt/slides/slide59.xml><?xml version="1.0" encoding="utf-8"?>
 <p:sld xmlns:a="http://schemas.openxmlformats.org/drawingml/2006/main" xmlns:p="http://schemas.openxmlformats.org/presentationml/2006/main" xmlns:r="http://schemas.openxmlformats.org/officeDocument/2006/relationships">
   <p:cSld>
     <p:spTree>
@@ -22091,7 +22091,7 @@
 </p:sld>
 </file>
 
-<file path=ppt/slides/slide38.xml><?xml version="1.0" encoding="utf-8"?>
+<file path=ppt/slides/slide60.xml><?xml version="1.0" encoding="utf-8"?>
 <p:sld xmlns:a="http://schemas.openxmlformats.org/drawingml/2006/main" xmlns:p="http://schemas.openxmlformats.org/presentationml/2006/main" xmlns:r="http://schemas.openxmlformats.org/officeDocument/2006/relationships">
   <p:cSld>
     <p:spTree>
@@ -22938,7 +22938,7 @@
 </p:sld>
 </file>
 
-<file path=ppt/slides/slide39.xml><?xml version="1.0" encoding="utf-8"?>
+<file path=ppt/slides/slide61.xml><?xml version="1.0" encoding="utf-8"?>
 <p:sld xmlns:a="http://schemas.openxmlformats.org/drawingml/2006/main" xmlns:p="http://schemas.openxmlformats.org/presentationml/2006/main" xmlns:r="http://schemas.openxmlformats.org/officeDocument/2006/relationships">
   <p:cSld>
     <p:spTree>
@@ -23633,7 +23633,7 @@
 </p:sld>
 </file>
 
-<file path=ppt/slides/slide40.xml><?xml version="1.0" encoding="utf-8"?>
+<file path=ppt/slides/slide62.xml><?xml version="1.0" encoding="utf-8"?>
 <p:sld xmlns:a="http://schemas.openxmlformats.org/drawingml/2006/main" xmlns:p="http://schemas.openxmlformats.org/presentationml/2006/main" xmlns:r="http://schemas.openxmlformats.org/officeDocument/2006/relationships">
   <p:cSld>
     <p:spTree>
@@ -24366,7 +24366,7 @@
 </p:sld>
 </file>
 
-<file path=ppt/slides/slide41.xml><?xml version="1.0" encoding="utf-8"?>
+<file path=ppt/slides/slide63.xml><?xml version="1.0" encoding="utf-8"?>
 <p:sld xmlns:a="http://schemas.openxmlformats.org/drawingml/2006/main" xmlns:p="http://schemas.openxmlformats.org/presentationml/2006/main" xmlns:r="http://schemas.openxmlformats.org/officeDocument/2006/relationships">
   <p:cSld>
     <p:spTree>
@@ -25501,7 +25501,7 @@
 </p:sld>
 </file>
 
-<file path=ppt/slides/slide42.xml><?xml version="1.0" encoding="utf-8"?>
+<file path=ppt/slides/slide64.xml><?xml version="1.0" encoding="utf-8"?>
 <p:sld xmlns:a="http://schemas.openxmlformats.org/drawingml/2006/main" xmlns:p="http://schemas.openxmlformats.org/presentationml/2006/main" xmlns:r="http://schemas.openxmlformats.org/officeDocument/2006/relationships">
   <p:cSld>
     <p:spTree>
@@ -26240,7 +26240,7 @@
 </p:sld>
 </file>
 
-<file path=ppt/slides/slide43.xml><?xml version="1.0" encoding="utf-8"?>
+<file path=ppt/slides/slide65.xml><?xml version="1.0" encoding="utf-8"?>
 <p:sld xmlns:a="http://schemas.openxmlformats.org/drawingml/2006/main" xmlns:p="http://schemas.openxmlformats.org/presentationml/2006/main" xmlns:r="http://schemas.openxmlformats.org/officeDocument/2006/relationships">
   <p:cSld>
     <p:spTree>
@@ -27422,7 +27422,7 @@
 </p:sld>
 </file>
 
-<file path=ppt/slides/slide44.xml><?xml version="1.0" encoding="utf-8"?>
+<file path=ppt/slides/slide66.xml><?xml version="1.0" encoding="utf-8"?>
 <p:sld xmlns:a="http://schemas.openxmlformats.org/drawingml/2006/main" xmlns:p="http://schemas.openxmlformats.org/presentationml/2006/main" xmlns:r="http://schemas.openxmlformats.org/officeDocument/2006/relationships">
   <p:cSld>
     <p:spTree>
@@ -28160,7 +28160,7 @@
 </p:sld>
 </file>
 
-<file path=ppt/slides/slide45.xml><?xml version="1.0" encoding="utf-8"?>
+<file path=ppt/slides/slide67.xml><?xml version="1.0" encoding="utf-8"?>
 <p:sld xmlns:a="http://schemas.openxmlformats.org/drawingml/2006/main" xmlns:p="http://schemas.openxmlformats.org/presentationml/2006/main" xmlns:r="http://schemas.openxmlformats.org/officeDocument/2006/relationships">
   <p:cSld>
     <p:spTree>
@@ -28791,7 +28791,7 @@
 </p:sld>
 </file>
 
-<file path=ppt/slides/slide46.xml><?xml version="1.0" encoding="utf-8"?>
+<file path=ppt/slides/slide68.xml><?xml version="1.0" encoding="utf-8"?>
 <p:sld xmlns:a="http://schemas.openxmlformats.org/drawingml/2006/main" xmlns:p="http://schemas.openxmlformats.org/presentationml/2006/main" xmlns:r="http://schemas.openxmlformats.org/officeDocument/2006/relationships">
   <p:cSld>
     <p:spTree>
@@ -29369,7 +29369,7 @@
 </p:sld>
 </file>
 
-<file path=ppt/slides/slide47.xml><?xml version="1.0" encoding="utf-8"?>
+<file path=ppt/slides/slide69.xml><?xml version="1.0" encoding="utf-8"?>
 <p:sld xmlns:a="http://schemas.openxmlformats.org/drawingml/2006/main" xmlns:p="http://schemas.openxmlformats.org/presentationml/2006/main" xmlns:r="http://schemas.openxmlformats.org/officeDocument/2006/relationships">
   <p:cSld>
     <p:spTree>
@@ -30380,7 +30380,7 @@
 </p:sld>
 </file>
 
-<file path=ppt/slides/slide48.xml><?xml version="1.0" encoding="utf-8"?>
+<file path=ppt/slides/slide70.xml><?xml version="1.0" encoding="utf-8"?>
 <p:sld xmlns:a="http://schemas.openxmlformats.org/drawingml/2006/main" xmlns:p="http://schemas.openxmlformats.org/presentationml/2006/main" xmlns:r="http://schemas.openxmlformats.org/officeDocument/2006/relationships">
   <p:cSld>
     <p:spTree>
@@ -31324,7 +31324,7 @@
 </p:sld>
 </file>
 
-<file path=ppt/slides/slide49.xml><?xml version="1.0" encoding="utf-8"?>
+<file path=ppt/slides/slide71.xml><?xml version="1.0" encoding="utf-8"?>
 <p:sld xmlns:a="http://schemas.openxmlformats.org/drawingml/2006/main" xmlns:p="http://schemas.openxmlformats.org/presentationml/2006/main" xmlns:r="http://schemas.openxmlformats.org/officeDocument/2006/relationships">
   <p:cSld>
     <p:spTree>
@@ -32642,7 +32642,7 @@
 </p:sld>
 </file>
 
-<file path=ppt/slides/slide50.xml><?xml version="1.0" encoding="utf-8"?>
+<file path=ppt/slides/slide72.xml><?xml version="1.0" encoding="utf-8"?>
 <p:sld xmlns:a="http://schemas.openxmlformats.org/drawingml/2006/main" xmlns:p="http://schemas.openxmlformats.org/presentationml/2006/main" xmlns:r="http://schemas.openxmlformats.org/officeDocument/2006/relationships">
   <p:cSld>
     <p:spTree>
@@ -33419,7 +33419,7 @@
 </p:sld>
 </file>
 
-<file path=ppt/slides/slide51.xml><?xml version="1.0" encoding="utf-8"?>
+<file path=ppt/slides/slide73.xml><?xml version="1.0" encoding="utf-8"?>
 <p:sld xmlns:a="http://schemas.openxmlformats.org/drawingml/2006/main" xmlns:p="http://schemas.openxmlformats.org/presentationml/2006/main" xmlns:r="http://schemas.openxmlformats.org/officeDocument/2006/relationships">
   <p:cSld>
     <p:spTree>
@@ -34342,7 +34342,7 @@
 </p:sld>
 </file>
 
-<file path=ppt/slides/slide52.xml><?xml version="1.0" encoding="utf-8"?>
+<file path=ppt/slides/slide74.xml><?xml version="1.0" encoding="utf-8"?>
 <p:sld xmlns:a="http://schemas.openxmlformats.org/drawingml/2006/main" xmlns:p="http://schemas.openxmlformats.org/presentationml/2006/main" xmlns:r="http://schemas.openxmlformats.org/officeDocument/2006/relationships">
   <p:cSld>
     <p:spTree>
@@ -35553,7 +35553,7 @@
 </p:sld>
 </file>
 
-<file path=ppt/slides/slide53.xml><?xml version="1.0" encoding="utf-8"?>
+<file path=ppt/slides/slide75.xml><?xml version="1.0" encoding="utf-8"?>
 <p:sld xmlns:a="http://schemas.openxmlformats.org/drawingml/2006/main" xmlns:p="http://schemas.openxmlformats.org/presentationml/2006/main" xmlns:r="http://schemas.openxmlformats.org/officeDocument/2006/relationships">
   <p:cSld>
     <p:spTree>
@@ -36286,7 +36286,7 @@
 </p:sld>
 </file>
 
-<file path=ppt/slides/slide54.xml><?xml version="1.0" encoding="utf-8"?>
+<file path=ppt/slides/slide76.xml><?xml version="1.0" encoding="utf-8"?>
 <p:sld xmlns:a="http://schemas.openxmlformats.org/drawingml/2006/main" xmlns:p="http://schemas.openxmlformats.org/presentationml/2006/main" xmlns:r="http://schemas.openxmlformats.org/officeDocument/2006/relationships">
   <p:cSld>
     <p:spTree>
@@ -37272,7 +37272,7 @@
 </p:sld>
 </file>
 
-<file path=ppt/slides/slide55.xml><?xml version="1.0" encoding="utf-8"?>
+<file path=ppt/slides/slide77.xml><?xml version="1.0" encoding="utf-8"?>
 <p:sld xmlns:a="http://schemas.openxmlformats.org/drawingml/2006/main" xmlns:p="http://schemas.openxmlformats.org/presentationml/2006/main" xmlns:r="http://schemas.openxmlformats.org/officeDocument/2006/relationships">
   <p:cSld>
     <p:spTree>
@@ -38163,7 +38163,7 @@
 </p:sld>
 </file>
 
-<file path=ppt/slides/slide56.xml><?xml version="1.0" encoding="utf-8"?>
+<file path=ppt/slides/slide78.xml><?xml version="1.0" encoding="utf-8"?>
 <p:sld xmlns:a="http://schemas.openxmlformats.org/drawingml/2006/main" xmlns:p="http://schemas.openxmlformats.org/presentationml/2006/main" xmlns:r="http://schemas.openxmlformats.org/officeDocument/2006/relationships">
   <p:cSld>
     <p:spTree>
@@ -38875,7 +38875,7 @@
 </p:sld>
 </file>
 
-<file path=ppt/slides/slide57.xml><?xml version="1.0" encoding="utf-8"?>
+<file path=ppt/slides/slide79.xml><?xml version="1.0" encoding="utf-8"?>
 <p:sld xmlns:a="http://schemas.openxmlformats.org/drawingml/2006/main" xmlns:p="http://schemas.openxmlformats.org/presentationml/2006/main" xmlns:r="http://schemas.openxmlformats.org/officeDocument/2006/relationships">
   <p:cSld>
     <p:spTree>
@@ -39975,7 +39975,7 @@
 </p:sld>
 </file>
 
-<file path=ppt/slides/slide58.xml><?xml version="1.0" encoding="utf-8"?>
+<file path=ppt/slides/slide80.xml><?xml version="1.0" encoding="utf-8"?>
 <p:sld xmlns:a="http://schemas.openxmlformats.org/drawingml/2006/main" xmlns:p="http://schemas.openxmlformats.org/presentationml/2006/main" xmlns:r="http://schemas.openxmlformats.org/officeDocument/2006/relationships">
   <p:cSld>
     <p:spTree>
